--- a/week04/Lab04.pptx
+++ b/week04/Lab04.pptx
@@ -6,7 +6,7 @@
     <p:sldMasterId id="2147483660" r:id="rId2"/>
   </p:sldMasterIdLst>
   <p:notesMasterIdLst>
-    <p:notesMasterId r:id="rId39"/>
+    <p:notesMasterId r:id="rId37"/>
   </p:notesMasterIdLst>
   <p:sldIdLst>
     <p:sldId id="256" r:id="rId3"/>
@@ -43,8 +43,6 @@
     <p:sldId id="446" r:id="rId34"/>
     <p:sldId id="483" r:id="rId35"/>
     <p:sldId id="572" r:id="rId36"/>
-    <p:sldId id="522" r:id="rId37"/>
-    <p:sldId id="779" r:id="rId38"/>
   </p:sldIdLst>
   <p:sldSz cx="12192000" cy="6858000"/>
   <p:notesSz cx="6858000" cy="9144000"/>
@@ -198,8 +196,6 @@
             <p14:sldId id="446"/>
             <p14:sldId id="483"/>
             <p14:sldId id="572"/>
-            <p14:sldId id="522"/>
-            <p14:sldId id="779"/>
           </p14:sldIdLst>
         </p14:section>
       </p14:sectionLst>
@@ -293,7 +289,7 @@
           <a:p>
             <a:fld id="{D1237EF7-A117-46B7-88A8-1B7FB98FF0F2}" type="datetimeFigureOut">
               <a:rPr lang="zh-CN" altLang="en-US" smtClean="0"/>
-              <a:t>2025/3/11</a:t>
+              <a:t>2026/3/23</a:t>
             </a:fld>
             <a:endParaRPr lang="zh-CN" altLang="en-US"/>
           </a:p>
@@ -2368,7 +2364,7 @@
           <a:p>
             <a:fld id="{FC19A4FA-3D9A-4114-B0D5-759CBD56F1AB}" type="datetimeFigureOut">
               <a:rPr lang="zh-CN" altLang="en-US" smtClean="0"/>
-              <a:t>2025/3/11</a:t>
+              <a:t>2026/3/23</a:t>
             </a:fld>
             <a:endParaRPr lang="zh-CN" altLang="en-US"/>
           </a:p>
@@ -2563,7 +2559,7 @@
           <a:p>
             <a:fld id="{FC19A4FA-3D9A-4114-B0D5-759CBD56F1AB}" type="datetimeFigureOut">
               <a:rPr lang="zh-CN" altLang="en-US" smtClean="0"/>
-              <a:t>2025/3/11</a:t>
+              <a:t>2026/3/23</a:t>
             </a:fld>
             <a:endParaRPr lang="zh-CN" altLang="en-US"/>
           </a:p>
@@ -2737,7 +2733,7 @@
           <a:p>
             <a:fld id="{FC19A4FA-3D9A-4114-B0D5-759CBD56F1AB}" type="datetimeFigureOut">
               <a:rPr lang="zh-CN" altLang="en-US" smtClean="0"/>
-              <a:t>2025/3/11</a:t>
+              <a:t>2026/3/23</a:t>
             </a:fld>
             <a:endParaRPr lang="zh-CN" altLang="en-US"/>
           </a:p>
@@ -2923,7 +2919,7 @@
           <a:p>
             <a:fld id="{FC19A4FA-3D9A-4114-B0D5-759CBD56F1AB}" type="datetimeFigureOut">
               <a:rPr lang="zh-CN" altLang="en-US" smtClean="0"/>
-              <a:t>2025/3/11</a:t>
+              <a:t>2026/3/23</a:t>
             </a:fld>
             <a:endParaRPr lang="zh-CN" altLang="en-US"/>
           </a:p>
@@ -3139,7 +3135,7 @@
           <a:p>
             <a:fld id="{FC19A4FA-3D9A-4114-B0D5-759CBD56F1AB}" type="datetimeFigureOut">
               <a:rPr lang="zh-CN" altLang="en-US" smtClean="0"/>
-              <a:t>2025/3/11</a:t>
+              <a:t>2026/3/23</a:t>
             </a:fld>
             <a:endParaRPr lang="zh-CN" altLang="en-US"/>
           </a:p>
@@ -3397,7 +3393,7 @@
           <a:p>
             <a:fld id="{FC19A4FA-3D9A-4114-B0D5-759CBD56F1AB}" type="datetimeFigureOut">
               <a:rPr lang="zh-CN" altLang="en-US" smtClean="0"/>
-              <a:t>2025/3/11</a:t>
+              <a:t>2026/3/23</a:t>
             </a:fld>
             <a:endParaRPr lang="zh-CN" altLang="en-US"/>
           </a:p>
@@ -3785,7 +3781,7 @@
           <a:p>
             <a:fld id="{FC19A4FA-3D9A-4114-B0D5-759CBD56F1AB}" type="datetimeFigureOut">
               <a:rPr lang="zh-CN" altLang="en-US" smtClean="0"/>
-              <a:t>2025/3/11</a:t>
+              <a:t>2026/3/23</a:t>
             </a:fld>
             <a:endParaRPr lang="zh-CN" altLang="en-US"/>
           </a:p>
@@ -4054,7 +4050,7 @@
           <a:p>
             <a:fld id="{FC19A4FA-3D9A-4114-B0D5-759CBD56F1AB}" type="datetimeFigureOut">
               <a:rPr lang="zh-CN" altLang="en-US" smtClean="0"/>
-              <a:t>2025/3/11</a:t>
+              <a:t>2026/3/23</a:t>
             </a:fld>
             <a:endParaRPr lang="zh-CN" altLang="en-US"/>
           </a:p>
@@ -4195,7 +4191,7 @@
           <a:p>
             <a:fld id="{FC19A4FA-3D9A-4114-B0D5-759CBD56F1AB}" type="datetimeFigureOut">
               <a:rPr lang="zh-CN" altLang="en-US" smtClean="0"/>
-              <a:t>2025/3/11</a:t>
+              <a:t>2026/3/23</a:t>
             </a:fld>
             <a:endParaRPr lang="zh-CN" altLang="en-US"/>
           </a:p>
@@ -4286,7 +4282,7 @@
           <a:p>
             <a:fld id="{FC19A4FA-3D9A-4114-B0D5-759CBD56F1AB}" type="datetimeFigureOut">
               <a:rPr lang="zh-CN" altLang="en-US" smtClean="0"/>
-              <a:t>2025/3/11</a:t>
+              <a:t>2026/3/23</a:t>
             </a:fld>
             <a:endParaRPr lang="zh-CN" altLang="en-US"/>
           </a:p>
@@ -4557,7 +4553,7 @@
           <a:p>
             <a:fld id="{FC19A4FA-3D9A-4114-B0D5-759CBD56F1AB}" type="datetimeFigureOut">
               <a:rPr lang="zh-CN" altLang="en-US" smtClean="0"/>
-              <a:t>2025/3/11</a:t>
+              <a:t>2026/3/23</a:t>
             </a:fld>
             <a:endParaRPr lang="zh-CN" altLang="en-US"/>
           </a:p>
@@ -4742,7 +4738,7 @@
           <a:p>
             <a:fld id="{FC19A4FA-3D9A-4114-B0D5-759CBD56F1AB}" type="datetimeFigureOut">
               <a:rPr lang="zh-CN" altLang="en-US" smtClean="0"/>
-              <a:t>2025/3/11</a:t>
+              <a:t>2026/3/23</a:t>
             </a:fld>
             <a:endParaRPr lang="zh-CN" altLang="en-US"/>
           </a:p>
@@ -5018,7 +5014,7 @@
           <a:p>
             <a:fld id="{FC19A4FA-3D9A-4114-B0D5-759CBD56F1AB}" type="datetimeFigureOut">
               <a:rPr lang="zh-CN" altLang="en-US" smtClean="0"/>
-              <a:t>2025/3/11</a:t>
+              <a:t>2026/3/23</a:t>
             </a:fld>
             <a:endParaRPr lang="zh-CN" altLang="en-US"/>
           </a:p>
@@ -5182,7 +5178,7 @@
           <a:p>
             <a:fld id="{FC19A4FA-3D9A-4114-B0D5-759CBD56F1AB}" type="datetimeFigureOut">
               <a:rPr lang="zh-CN" altLang="en-US" smtClean="0"/>
-              <a:t>2025/3/11</a:t>
+              <a:t>2026/3/23</a:t>
             </a:fld>
             <a:endParaRPr lang="zh-CN" altLang="en-US"/>
           </a:p>
@@ -5356,7 +5352,7 @@
           <a:p>
             <a:fld id="{FC19A4FA-3D9A-4114-B0D5-759CBD56F1AB}" type="datetimeFigureOut">
               <a:rPr lang="zh-CN" altLang="en-US" smtClean="0"/>
-              <a:t>2025/3/11</a:t>
+              <a:t>2026/3/23</a:t>
             </a:fld>
             <a:endParaRPr lang="zh-CN" altLang="en-US"/>
           </a:p>
@@ -5586,7 +5582,7 @@
           <a:p>
             <a:fld id="{FC19A4FA-3D9A-4114-B0D5-759CBD56F1AB}" type="datetimeFigureOut">
               <a:rPr lang="zh-CN" altLang="en-US" smtClean="0"/>
-              <a:t>2025/3/11</a:t>
+              <a:t>2026/3/23</a:t>
             </a:fld>
             <a:endParaRPr lang="zh-CN" altLang="en-US"/>
           </a:p>
@@ -5974,7 +5970,7 @@
           <a:p>
             <a:fld id="{FC19A4FA-3D9A-4114-B0D5-759CBD56F1AB}" type="datetimeFigureOut">
               <a:rPr lang="zh-CN" altLang="en-US" smtClean="0"/>
-              <a:t>2025/3/11</a:t>
+              <a:t>2026/3/23</a:t>
             </a:fld>
             <a:endParaRPr lang="zh-CN" altLang="en-US"/>
           </a:p>
@@ -6243,7 +6239,7 @@
           <a:p>
             <a:fld id="{FC19A4FA-3D9A-4114-B0D5-759CBD56F1AB}" type="datetimeFigureOut">
               <a:rPr lang="zh-CN" altLang="en-US" smtClean="0"/>
-              <a:t>2025/3/11</a:t>
+              <a:t>2026/3/23</a:t>
             </a:fld>
             <a:endParaRPr lang="zh-CN" altLang="en-US"/>
           </a:p>
@@ -6384,7 +6380,7 @@
           <a:p>
             <a:fld id="{FC19A4FA-3D9A-4114-B0D5-759CBD56F1AB}" type="datetimeFigureOut">
               <a:rPr lang="zh-CN" altLang="en-US" smtClean="0"/>
-              <a:t>2025/3/11</a:t>
+              <a:t>2026/3/23</a:t>
             </a:fld>
             <a:endParaRPr lang="zh-CN" altLang="en-US"/>
           </a:p>
@@ -6475,7 +6471,7 @@
           <a:p>
             <a:fld id="{FC19A4FA-3D9A-4114-B0D5-759CBD56F1AB}" type="datetimeFigureOut">
               <a:rPr lang="zh-CN" altLang="en-US" smtClean="0"/>
-              <a:t>2025/3/11</a:t>
+              <a:t>2026/3/23</a:t>
             </a:fld>
             <a:endParaRPr lang="zh-CN" altLang="en-US"/>
           </a:p>
@@ -6746,7 +6742,7 @@
           <a:p>
             <a:fld id="{FC19A4FA-3D9A-4114-B0D5-759CBD56F1AB}" type="datetimeFigureOut">
               <a:rPr lang="zh-CN" altLang="en-US" smtClean="0"/>
-              <a:t>2025/3/11</a:t>
+              <a:t>2026/3/23</a:t>
             </a:fld>
             <a:endParaRPr lang="zh-CN" altLang="en-US"/>
           </a:p>
@@ -6994,7 +6990,7 @@
           <a:p>
             <a:fld id="{FC19A4FA-3D9A-4114-B0D5-759CBD56F1AB}" type="datetimeFigureOut">
               <a:rPr lang="zh-CN" altLang="en-US" smtClean="0"/>
-              <a:t>2025/3/11</a:t>
+              <a:t>2026/3/23</a:t>
             </a:fld>
             <a:endParaRPr lang="zh-CN" altLang="en-US"/>
           </a:p>
@@ -7201,7 +7197,7 @@
           <a:p>
             <a:fld id="{FC19A4FA-3D9A-4114-B0D5-759CBD56F1AB}" type="datetimeFigureOut">
               <a:rPr lang="zh-CN" altLang="en-US" smtClean="0"/>
-              <a:t>2025/3/11</a:t>
+              <a:t>2026/3/23</a:t>
             </a:fld>
             <a:endParaRPr lang="zh-CN" altLang="en-US"/>
           </a:p>
@@ -7776,7 +7772,7 @@
           <a:p>
             <a:fld id="{FC19A4FA-3D9A-4114-B0D5-759CBD56F1AB}" type="datetimeFigureOut">
               <a:rPr lang="zh-CN" altLang="en-US" smtClean="0"/>
-              <a:t>2025/3/11</a:t>
+              <a:t>2026/3/23</a:t>
             </a:fld>
             <a:endParaRPr lang="zh-CN" altLang="en-US"/>
           </a:p>
@@ -9054,7 +9050,7 @@
         <p:spPr>
           <a:xfrm>
             <a:off x="1558075" y="481963"/>
-            <a:ext cx="6003290" cy="608965"/>
+            <a:ext cx="5732986" cy="611167"/>
           </a:xfrm>
           <a:prstGeom prst="rect">
             <a:avLst/>
@@ -9073,7 +9069,7 @@
                   <a:prstClr val="black"/>
                 </a:solidFill>
               </a:rPr>
-              <a:t>2. Multi-source files in a project-1</a:t>
+              <a:t>2. Multi-source files in Project-1</a:t>
             </a:r>
             <a:endParaRPr lang="zh-CN" altLang="en-US" sz="3265" b="1" dirty="0">
               <a:solidFill>
@@ -9502,7 +9498,7 @@
         <p:spPr>
           <a:xfrm>
             <a:off x="1588341" y="490989"/>
-            <a:ext cx="6003290" cy="608965"/>
+            <a:ext cx="5732986" cy="611167"/>
           </a:xfrm>
           <a:prstGeom prst="rect">
             <a:avLst/>
@@ -9526,7 +9522,7 @@
                 <a:latin typeface="Calibri" panose="020F0502020204030204"/>
                 <a:ea typeface="宋体" panose="02010600030101010101" pitchFamily="2" charset="-122"/>
               </a:rPr>
-              <a:t>2. Multi-source files in a project-2</a:t>
+              <a:t>2. Multi-source files in Project-2</a:t>
             </a:r>
             <a:endParaRPr lang="zh-CN" altLang="en-US" sz="3265" b="1" dirty="0">
               <a:solidFill>
@@ -24387,7 +24383,7 @@
           <a:p>
             <a:r>
               <a:rPr kumimoji="1" lang="en-US" altLang="zh-CN" sz="2400" dirty="0"/>
-              <a:t>Please refer to the content of courseware </a:t>
+              <a:t>Please refer to </a:t>
             </a:r>
             <a:r>
               <a:rPr kumimoji="1" lang="en-US" altLang="zh-CN" sz="2400" dirty="0">
@@ -24414,7 +24410,7 @@
             </a:br>
             <a:r>
               <a:rPr kumimoji="1" lang="en-US" altLang="zh-CN" sz="2400" dirty="0"/>
-              <a:t>all the source files are in ./src , all the head files are in ./inc,  all the build files are in ./build.</a:t>
+              <a:t>all the source files are in ./src , all the head files are in ./include,  all the build files are in ./build.</a:t>
             </a:r>
             <a:br>
               <a:rPr kumimoji="1" lang="en-US" altLang="zh-CN" sz="2400" dirty="0"/>
@@ -24612,17 +24608,7 @@
             </a:pPr>
             <a:r>
               <a:rPr lang="en-US" sz="1500" dirty="0"/>
-              <a:t>First, complete the code, then run the program, explain the result  and answer the following question </a:t>
-            </a:r>
-            <a:r>
-              <a:rPr lang="en-US" sz="1500" dirty="0">
-                <a:sym typeface="+mn-ea"/>
-              </a:rPr>
-              <a:t>to SA</a:t>
-            </a:r>
-            <a:r>
-              <a:rPr lang="en-US" sz="1500" dirty="0"/>
-              <a:t>. If it has bugs, fix them.</a:t>
+              <a:t>First, complete the code, then run the program, and explain the results. If it has bugs, fix them.</a:t>
             </a:r>
           </a:p>
           <a:p>
@@ -24649,7 +24635,15 @@
             </a:r>
             <a:r>
               <a:rPr lang="en-US" altLang="zh-CN" sz="1500" dirty="0"/>
-              <a:t>It is asked to get the the number of characters in ‘dirction’(which should be 4) by using strlen without changing the size of the ‘dirction’ array, one option is to add a piece of code between the definitions on “dirction” and “title”:</a:t>
+              <a:t>Which of the following code can be added between the definitions of ‘direction’ and ‘title’ to make </a:t>
+            </a:r>
+            <a:r>
+              <a:rPr lang="en-US" altLang="zh-CN" sz="1500" dirty="0" err="1"/>
+              <a:t>strlen</a:t>
+            </a:r>
+            <a:r>
+              <a:rPr lang="en-US" altLang="zh-CN" sz="1500" dirty="0"/>
+              <a:t>(direction) return 4, and why?</a:t>
             </a:r>
           </a:p>
           <a:p>
@@ -24662,7 +24656,7 @@
             </a:pPr>
             <a:r>
               <a:rPr lang="en-US" altLang="zh-CN" sz="1500" dirty="0"/>
-              <a:t>A. char x = ‘ ’;  //a spce in ‘’</a:t>
+              <a:t>A. char x = ' ';  //a spce in ' '</a:t>
             </a:r>
           </a:p>
           <a:p>
@@ -24688,7 +24682,7 @@
             </a:pPr>
             <a:r>
               <a:rPr lang="en-US" altLang="zh-CN" sz="1500" dirty="0"/>
-              <a:t>C. char x=’\0’</a:t>
+              <a:t>C. char x='\0'</a:t>
             </a:r>
           </a:p>
           <a:p>
@@ -24701,7 +24695,15 @@
             </a:pPr>
             <a:r>
               <a:rPr lang="en-US" altLang="zh-CN" sz="1500" dirty="0"/>
-              <a:t>D. char xs[]=“ ”  // a space in “”</a:t>
+              <a:t>D. char </a:t>
+            </a:r>
+            <a:r>
+              <a:rPr lang="en-US" altLang="zh-CN" sz="1500" dirty="0" err="1"/>
+              <a:t>xs</a:t>
+            </a:r>
+            <a:r>
+              <a:rPr lang="en-US" altLang="zh-CN" sz="1500" dirty="0"/>
+              <a:t>[]=" "  // a space in " "</a:t>
             </a:r>
           </a:p>
           <a:p>
@@ -24714,7 +24716,7 @@
             </a:pPr>
             <a:r>
               <a:rPr lang="en-US" altLang="zh-CN" sz="1500" dirty="0"/>
-              <a:t>E. other method</a:t>
+              <a:t>E. None of above</a:t>
             </a:r>
             <a:endParaRPr lang="zh-CN" altLang="en-US" sz="1500" dirty="0"/>
           </a:p>
@@ -25319,7 +25321,7 @@
             </a:pPr>
             <a:r>
               <a:rPr lang="en-US" dirty="0"/>
-              <a:t>Run the program and explain the result to SA. </a:t>
+              <a:t>Run the program and explain the results. </a:t>
             </a:r>
           </a:p>
           <a:p>
@@ -25396,36 +25398,48 @@
           <a:lstStyle/>
           <a:p>
             <a:r>
-              <a:rPr lang="en-US" altLang="zh-CN" sz="1600" b="0" dirty="0">
-                <a:effectLst/>
-              </a:rPr>
-              <a:t>#include &lt;</a:t>
-            </a:r>
-            <a:r>
-              <a:rPr lang="en-US" altLang="zh-CN" sz="1600" b="0" dirty="0" err="1">
-                <a:effectLst/>
-              </a:rPr>
-              <a:t>stdio.h</a:t>
-            </a:r>
-            <a:r>
-              <a:rPr lang="en-US" altLang="zh-CN" sz="1600" b="0" dirty="0">
-                <a:effectLst/>
-              </a:rPr>
-              <a:t>&gt;  </a:t>
-            </a:r>
-            <a:r>
-              <a:rPr lang="en-US" altLang="zh-CN" sz="1600" b="0" dirty="0">
+              <a:rPr lang="en-US" altLang="zh-CN" sz="1600" dirty="0">
                 <a:solidFill>
                   <a:schemeClr val="bg1">
                     <a:lumMod val="50000"/>
                   </a:schemeClr>
                 </a:solidFill>
+              </a:rPr>
+              <a:t>//</a:t>
+            </a:r>
+            <a:r>
+              <a:rPr lang="en-US" altLang="zh-CN" sz="1600" dirty="0" err="1">
+                <a:solidFill>
+                  <a:schemeClr val="bg1">
+                    <a:lumMod val="50000"/>
+                  </a:schemeClr>
+                </a:solidFill>
+              </a:rPr>
+              <a:t>print.c</a:t>
+            </a:r>
+            <a:endParaRPr lang="en-US" altLang="zh-CN" sz="1600" b="0" dirty="0">
+              <a:effectLst/>
+            </a:endParaRPr>
+          </a:p>
+          <a:p>
+            <a:r>
+              <a:rPr lang="en-US" altLang="zh-CN" sz="1600" b="0" dirty="0">
                 <a:effectLst/>
               </a:rPr>
-              <a:t>//p2.c</a:t>
-            </a:r>
-          </a:p>
-          <a:p>
+              <a:t>#include &lt;</a:t>
+            </a:r>
+            <a:r>
+              <a:rPr lang="en-US" altLang="zh-CN" sz="1600" b="0" dirty="0" err="1">
+                <a:effectLst/>
+              </a:rPr>
+              <a:t>stdio.h</a:t>
+            </a:r>
+            <a:r>
+              <a:rPr lang="en-US" altLang="zh-CN" sz="1600" b="0" dirty="0">
+                <a:effectLst/>
+              </a:rPr>
+              <a:t>&gt;</a:t>
+            </a:r>
             <a:br>
               <a:rPr lang="en-US" altLang="zh-CN" sz="1600" b="0" dirty="0">
                 <a:effectLst/>
@@ -25891,547 +25905,6 @@
             <a:fld id="{506F4176-339E-4C4B-80E4-BBE9C4467EFE}" type="slidenum">
               <a:rPr lang="zh-CN" altLang="en-US" smtClean="0"/>
               <a:t>34</a:t>
-            </a:fld>
-            <a:endParaRPr lang="zh-CN" altLang="en-US"/>
-          </a:p>
-        </p:txBody>
-      </p:sp>
-    </p:spTree>
-  </p:cSld>
-  <p:clrMapOvr>
-    <a:masterClrMapping/>
-  </p:clrMapOvr>
-</p:sld>
-</file>
-
-<file path=ppt/slides/slide35.xml><?xml version="1.0" encoding="utf-8"?>
-<p:sld xmlns:a="http://schemas.openxmlformats.org/drawingml/2006/main" xmlns:r="http://schemas.openxmlformats.org/officeDocument/2006/relationships" xmlns:p="http://schemas.openxmlformats.org/presentationml/2006/main">
-  <p:cSld>
-    <p:spTree>
-      <p:nvGrpSpPr>
-        <p:cNvPr id="1" name=""/>
-        <p:cNvGrpSpPr/>
-        <p:nvPr/>
-      </p:nvGrpSpPr>
-      <p:grpSpPr>
-        <a:xfrm>
-          <a:off x="0" y="0"/>
-          <a:ext cx="0" cy="0"/>
-          <a:chOff x="0" y="0"/>
-          <a:chExt cx="0" cy="0"/>
-        </a:xfrm>
-      </p:grpSpPr>
-      <p:sp>
-        <p:nvSpPr>
-          <p:cNvPr id="2" name="标题 1"/>
-          <p:cNvSpPr>
-            <a:spLocks noGrp="1"/>
-          </p:cNvSpPr>
-          <p:nvPr>
-            <p:ph type="title"/>
-          </p:nvPr>
-        </p:nvSpPr>
-        <p:spPr/>
-        <p:txBody>
-          <a:bodyPr/>
-          <a:lstStyle/>
-          <a:p>
-            <a:r>
-              <a:rPr lang="en-US" altLang="zh-CN" dirty="0"/>
-              <a:t>Exercise 4</a:t>
-            </a:r>
-          </a:p>
-        </p:txBody>
-      </p:sp>
-      <p:sp>
-        <p:nvSpPr>
-          <p:cNvPr id="3" name="内容占位符 2"/>
-          <p:cNvSpPr>
-            <a:spLocks noGrp="1"/>
-          </p:cNvSpPr>
-          <p:nvPr>
-            <p:ph idx="1"/>
-          </p:nvPr>
-        </p:nvSpPr>
-        <p:spPr>
-          <a:xfrm>
-            <a:off x="838200" y="1097915"/>
-            <a:ext cx="5415915" cy="4493895"/>
-          </a:xfrm>
-        </p:spPr>
-        <p:txBody>
-          <a:bodyPr>
-            <a:normAutofit fontScale="80000"/>
-          </a:bodyPr>
-          <a:lstStyle/>
-          <a:p>
-            <a:r>
-              <a:rPr lang="en-US" altLang="zh-CN" sz="2400" dirty="0"/>
-              <a:t>Complete the code on the right hand:</a:t>
-            </a:r>
-          </a:p>
-          <a:p>
-            <a:r>
-              <a:rPr lang="en-US" altLang="zh-CN" sz="2400" dirty="0"/>
-              <a:t>1) Design two enumeration types. The first is an </a:t>
-            </a:r>
-            <a:r>
-              <a:rPr lang="en-US" altLang="zh-CN" sz="2400" dirty="0" err="1"/>
-              <a:t>enum</a:t>
-            </a:r>
-            <a:r>
-              <a:rPr lang="en-US" altLang="zh-CN" sz="2400" dirty="0"/>
-              <a:t> “</a:t>
-            </a:r>
-            <a:r>
-              <a:rPr lang="en-US" altLang="zh-CN" sz="2400" b="1" dirty="0"/>
-              <a:t>Day</a:t>
-            </a:r>
-            <a:r>
-              <a:rPr lang="en-US" altLang="zh-CN" sz="2400" dirty="0"/>
-              <a:t>” for (Monday, Tuesday, Wednesday, Thursday, Friday, Saturday, Sunday), and the second is an </a:t>
-            </a:r>
-            <a:r>
-              <a:rPr lang="en-US" altLang="zh-CN" sz="2400" dirty="0" err="1"/>
-              <a:t>enum</a:t>
-            </a:r>
-            <a:r>
-              <a:rPr lang="en-US" altLang="zh-CN" sz="2400" dirty="0"/>
-              <a:t> “</a:t>
-            </a:r>
-            <a:r>
-              <a:rPr lang="en-US" altLang="zh-CN" sz="2400" b="1" dirty="0"/>
-              <a:t>Weather</a:t>
-            </a:r>
-            <a:r>
-              <a:rPr lang="en-US" altLang="zh-CN" sz="2400" dirty="0"/>
-              <a:t>” for (SUNNY, RAINY, CLOUDY, SNOWNY).</a:t>
-            </a:r>
-          </a:p>
-          <a:p>
-            <a:r>
-              <a:rPr lang="en-US" altLang="zh-CN" sz="2400" dirty="0"/>
-              <a:t>2) Complete the main function, which ask user to input the day value and the weather value accoding to the notice information, if the day is at weekend and the weather is </a:t>
-            </a:r>
-            <a:r>
-              <a:rPr lang="en-US" altLang="zh-CN" sz="2400" dirty="0">
-                <a:sym typeface="+mn-ea"/>
-              </a:rPr>
-              <a:t>SUNNY, pring out “can Travel”, else print out “not suitable for travelling”.</a:t>
-            </a:r>
-            <a:endParaRPr lang="en-US" altLang="zh-CN" sz="2400" dirty="0"/>
-          </a:p>
-          <a:p>
-            <a:r>
-              <a:rPr lang="en-US" altLang="zh-CN" sz="2400" dirty="0"/>
-              <a:t>The testing result is as shown on the next page.</a:t>
-            </a:r>
-            <a:endParaRPr lang="zh-CN" altLang="en-US" sz="2400" dirty="0"/>
-          </a:p>
-        </p:txBody>
-      </p:sp>
-      <p:sp>
-        <p:nvSpPr>
-          <p:cNvPr id="6" name="文本框 5"/>
-          <p:cNvSpPr txBox="1"/>
-          <p:nvPr/>
-        </p:nvSpPr>
-        <p:spPr>
-          <a:xfrm>
-            <a:off x="6539865" y="881380"/>
-            <a:ext cx="5249545" cy="5656580"/>
-          </a:xfrm>
-          <a:prstGeom prst="rect">
-            <a:avLst/>
-          </a:prstGeom>
-          <a:solidFill>
-            <a:schemeClr val="accent1">
-              <a:lumMod val="20000"/>
-              <a:lumOff val="80000"/>
-            </a:schemeClr>
-          </a:solidFill>
-          <a:ln>
-            <a:solidFill>
-              <a:srgbClr val="0000CC"/>
-            </a:solidFill>
-          </a:ln>
-        </p:spPr>
-        <p:txBody>
-          <a:bodyPr wrap="square" rtlCol="0">
-            <a:noAutofit/>
-          </a:bodyPr>
-          <a:lstStyle/>
-          <a:p>
-            <a:r>
-              <a:rPr lang="en-US" altLang="zh-CN" sz="1400"/>
-              <a:t>#include &lt;iostream&gt;</a:t>
-            </a:r>
-          </a:p>
-          <a:p>
-            <a:r>
-              <a:rPr lang="en-US" altLang="zh-CN" sz="1400"/>
-              <a:t>using namespace std;</a:t>
-            </a:r>
-          </a:p>
-          <a:p>
-            <a:r>
-              <a:rPr lang="en-US" altLang="zh-CN" sz="1400"/>
-              <a:t>enum Day{</a:t>
-            </a:r>
-            <a:r>
-              <a:rPr lang="en-US" altLang="zh-CN" sz="1400">
-                <a:highlight>
-                  <a:srgbClr val="FFFF00"/>
-                </a:highlight>
-              </a:rPr>
-              <a:t>/*complete code here if needed*/</a:t>
-            </a:r>
-            <a:r>
-              <a:rPr lang="en-US" altLang="zh-CN" sz="1400"/>
-              <a:t>};</a:t>
-            </a:r>
-          </a:p>
-          <a:p>
-            <a:r>
-              <a:rPr lang="en-US" altLang="zh-CN" sz="1400"/>
-              <a:t>enum Weather{</a:t>
-            </a:r>
-            <a:r>
-              <a:rPr lang="en-US" altLang="zh-CN" sz="1400">
-                <a:highlight>
-                  <a:srgbClr val="FFFF00"/>
-                </a:highlight>
-                <a:sym typeface="+mn-ea"/>
-              </a:rPr>
-              <a:t>/*complete code here if needed*/</a:t>
-            </a:r>
-            <a:r>
-              <a:rPr lang="en-US" altLang="zh-CN" sz="1400"/>
-              <a:t>};</a:t>
-            </a:r>
-          </a:p>
-          <a:p>
-            <a:endParaRPr lang="en-US" altLang="zh-CN" sz="1400"/>
-          </a:p>
-          <a:p>
-            <a:r>
-              <a:rPr lang="en-US" altLang="zh-CN" sz="1400"/>
-              <a:t>int main( </a:t>
-            </a:r>
-            <a:r>
-              <a:rPr lang="en-US" altLang="zh-CN" sz="1400">
-                <a:highlight>
-                  <a:srgbClr val="FFFF00"/>
-                </a:highlight>
-                <a:sym typeface="+mn-ea"/>
-              </a:rPr>
-              <a:t>/*complete code here if needed*/ </a:t>
-            </a:r>
-            <a:r>
-              <a:rPr lang="en-US" altLang="zh-CN" sz="1400"/>
-              <a:t>){</a:t>
-            </a:r>
-          </a:p>
-          <a:p>
-            <a:r>
-              <a:rPr lang="en-US" altLang="zh-CN" sz="1400"/>
-              <a:t>    int d=0;</a:t>
-            </a:r>
-          </a:p>
-          <a:p>
-            <a:r>
-              <a:rPr lang="en-US" altLang="zh-CN" sz="1400"/>
-              <a:t>    int w=0;</a:t>
-            </a:r>
-          </a:p>
-          <a:p>
-            <a:r>
-              <a:rPr lang="en-US" altLang="zh-CN" sz="1400"/>
-              <a:t>    cout&lt;&lt;"input the Day value:</a:t>
-            </a:r>
-          </a:p>
-          <a:p>
-            <a:r>
-              <a:rPr lang="en-US" altLang="zh-CN" sz="1400"/>
-              <a:t> Monday(1), Tuesday(2), Wednesday(3), Thursday(4), </a:t>
-            </a:r>
-          </a:p>
-          <a:p>
-            <a:r>
-              <a:rPr lang="en-US" altLang="zh-CN" sz="1400"/>
-              <a:t>Friday(5), Saturday(6), Sunday(7)\n";</a:t>
-            </a:r>
-          </a:p>
-          <a:p>
-            <a:r>
-              <a:rPr lang="en-US" altLang="zh-CN" sz="1400"/>
-              <a:t>   </a:t>
-            </a:r>
-            <a:r>
-              <a:rPr lang="en-US" altLang="zh-CN" sz="1400">
-                <a:highlight>
-                  <a:srgbClr val="FFFF00"/>
-                </a:highlight>
-                <a:sym typeface="+mn-ea"/>
-              </a:rPr>
-              <a:t>/*complete code here if needed*/</a:t>
-            </a:r>
-          </a:p>
-          <a:p>
-            <a:endParaRPr lang="en-US" altLang="zh-CN" sz="1400"/>
-          </a:p>
-          <a:p>
-            <a:r>
-              <a:rPr lang="en-US" altLang="zh-CN" sz="1400"/>
-              <a:t>    cout&lt;&lt;"This is"&lt;&lt;</a:t>
-            </a:r>
-            <a:r>
-              <a:rPr lang="en-US" altLang="zh-CN" sz="1400">
-                <a:highlight>
-                  <a:srgbClr val="FFFF00"/>
-                </a:highlight>
-                <a:sym typeface="+mn-ea"/>
-              </a:rPr>
-              <a:t>/*complete code here if needed*/</a:t>
-            </a:r>
-            <a:r>
-              <a:rPr lang="en-US" altLang="zh-CN" sz="1400"/>
-              <a:t>&lt;&lt;endl;</a:t>
-            </a:r>
-          </a:p>
-          <a:p>
-            <a:endParaRPr lang="en-US" altLang="zh-CN" sz="1400"/>
-          </a:p>
-          <a:p>
-            <a:r>
-              <a:rPr lang="en-US" altLang="zh-CN" sz="1400"/>
-              <a:t>    cout&lt;&lt;"input the Weather value: SUNNY(0), RAINY(1), CLOUDY(2), SNOWNY(3)\n";</a:t>
-            </a:r>
-          </a:p>
-          <a:p>
-            <a:r>
-              <a:rPr lang="en-US" altLang="zh-CN" sz="1400"/>
-              <a:t>    </a:t>
-            </a:r>
-            <a:r>
-              <a:rPr lang="en-US" altLang="zh-CN" sz="1400">
-                <a:sym typeface="+mn-ea"/>
-              </a:rPr>
-              <a:t> </a:t>
-            </a:r>
-            <a:r>
-              <a:rPr lang="en-US" altLang="zh-CN" sz="1400">
-                <a:highlight>
-                  <a:srgbClr val="FFFF00"/>
-                </a:highlight>
-                <a:sym typeface="+mn-ea"/>
-              </a:rPr>
-              <a:t>/*complete code here if needed*/</a:t>
-            </a:r>
-          </a:p>
-          <a:p>
-            <a:endParaRPr lang="en-US" altLang="zh-CN" sz="1400">
-              <a:highlight>
-                <a:srgbClr val="FFFF00"/>
-              </a:highlight>
-              <a:sym typeface="+mn-ea"/>
-            </a:endParaRPr>
-          </a:p>
-          <a:p>
-            <a:r>
-              <a:rPr lang="en-US" altLang="zh-CN" sz="1400"/>
-              <a:t>    cout&lt;&lt;"The weather is: "&lt;&lt;</a:t>
-            </a:r>
-            <a:r>
-              <a:rPr lang="en-US" altLang="zh-CN" sz="1400">
-                <a:sym typeface="+mn-ea"/>
-              </a:rPr>
-              <a:t> </a:t>
-            </a:r>
-            <a:r>
-              <a:rPr lang="en-US" altLang="zh-CN" sz="1400">
-                <a:highlight>
-                  <a:srgbClr val="FFFF00"/>
-                </a:highlight>
-                <a:sym typeface="+mn-ea"/>
-              </a:rPr>
-              <a:t>/*complete code here if needed*/</a:t>
-            </a:r>
-            <a:r>
-              <a:rPr lang="en-US" altLang="zh-CN" sz="1400"/>
-              <a:t>;</a:t>
-            </a:r>
-          </a:p>
-          <a:p>
-            <a:endParaRPr lang="en-US" altLang="zh-CN" sz="1400"/>
-          </a:p>
-          <a:p>
-            <a:r>
-              <a:rPr lang="en-US" altLang="zh-CN" sz="1400"/>
-              <a:t>   </a:t>
-            </a:r>
-            <a:r>
-              <a:rPr lang="en-US" altLang="zh-CN" sz="1400">
-                <a:sym typeface="+mn-ea"/>
-              </a:rPr>
-              <a:t>if(</a:t>
-            </a:r>
-            <a:r>
-              <a:rPr lang="en-US" altLang="zh-CN" sz="1400">
-                <a:highlight>
-                  <a:srgbClr val="FFFF00"/>
-                </a:highlight>
-                <a:sym typeface="+mn-ea"/>
-              </a:rPr>
-              <a:t>/*complete code here if needed*/</a:t>
-            </a:r>
-            <a:r>
-              <a:rPr lang="en-US" altLang="zh-CN" sz="1400">
-                <a:sym typeface="+mn-ea"/>
-              </a:rPr>
-              <a:t>) cout&lt;&lt;"can Travel\n";</a:t>
-            </a:r>
-          </a:p>
-          <a:p>
-            <a:r>
-              <a:rPr lang="en-US" altLang="zh-CN" sz="1400">
-                <a:sym typeface="+mn-ea"/>
-              </a:rPr>
-              <a:t>    else cout&lt;&lt;"not suitable for travelling\n"; </a:t>
-            </a:r>
-            <a:endParaRPr lang="en-US" altLang="zh-CN" sz="1400">
-              <a:highlight>
-                <a:srgbClr val="FFFF00"/>
-              </a:highlight>
-              <a:sym typeface="+mn-ea"/>
-            </a:endParaRPr>
-          </a:p>
-          <a:p>
-            <a:r>
-              <a:rPr lang="en-US" altLang="zh-CN" sz="1400"/>
-              <a:t>    return 0;</a:t>
-            </a:r>
-          </a:p>
-          <a:p>
-            <a:r>
-              <a:rPr lang="en-US" altLang="zh-CN" sz="1400"/>
-              <a:t>}</a:t>
-            </a:r>
-          </a:p>
-        </p:txBody>
-      </p:sp>
-      <p:sp>
-        <p:nvSpPr>
-          <p:cNvPr id="4" name="灯片编号占位符 3"/>
-          <p:cNvSpPr>
-            <a:spLocks noGrp="1"/>
-          </p:cNvSpPr>
-          <p:nvPr>
-            <p:ph type="sldNum" sz="quarter" idx="12"/>
-          </p:nvPr>
-        </p:nvSpPr>
-        <p:spPr/>
-        <p:txBody>
-          <a:bodyPr/>
-          <a:lstStyle/>
-          <a:p>
-            <a:fld id="{506F4176-339E-4C4B-80E4-BBE9C4467EFE}" type="slidenum">
-              <a:rPr lang="zh-CN" altLang="en-US" smtClean="0"/>
-              <a:t>35</a:t>
-            </a:fld>
-            <a:endParaRPr lang="zh-CN" altLang="en-US"/>
-          </a:p>
-        </p:txBody>
-      </p:sp>
-    </p:spTree>
-  </p:cSld>
-  <p:clrMapOvr>
-    <a:masterClrMapping/>
-  </p:clrMapOvr>
-</p:sld>
-</file>
-
-<file path=ppt/slides/slide36.xml><?xml version="1.0" encoding="utf-8"?>
-<p:sld xmlns:a="http://schemas.openxmlformats.org/drawingml/2006/main" xmlns:r="http://schemas.openxmlformats.org/officeDocument/2006/relationships" xmlns:p="http://schemas.openxmlformats.org/presentationml/2006/main">
-  <p:cSld>
-    <p:spTree>
-      <p:nvGrpSpPr>
-        <p:cNvPr id="1" name=""/>
-        <p:cNvGrpSpPr/>
-        <p:nvPr/>
-      </p:nvGrpSpPr>
-      <p:grpSpPr>
-        <a:xfrm>
-          <a:off x="0" y="0"/>
-          <a:ext cx="0" cy="0"/>
-          <a:chOff x="0" y="0"/>
-          <a:chExt cx="0" cy="0"/>
-        </a:xfrm>
-      </p:grpSpPr>
-      <p:sp>
-        <p:nvSpPr>
-          <p:cNvPr id="2" name="标题 1"/>
-          <p:cNvSpPr>
-            <a:spLocks noGrp="1"/>
-          </p:cNvSpPr>
-          <p:nvPr>
-            <p:ph type="title"/>
-          </p:nvPr>
-        </p:nvSpPr>
-        <p:spPr/>
-        <p:txBody>
-          <a:bodyPr/>
-          <a:lstStyle/>
-          <a:p>
-            <a:r>
-              <a:rPr lang="en-US" altLang="zh-CN" dirty="0"/>
-              <a:t>Exercise 4</a:t>
-            </a:r>
-          </a:p>
-        </p:txBody>
-      </p:sp>
-      <p:pic>
-        <p:nvPicPr>
-          <p:cNvPr id="7" name="图片 6"/>
-          <p:cNvPicPr>
-            <a:picLocks noChangeAspect="1"/>
-          </p:cNvPicPr>
-          <p:nvPr/>
-        </p:nvPicPr>
-        <p:blipFill>
-          <a:blip r:embed="rId2"/>
-          <a:stretch>
-            <a:fillRect/>
-          </a:stretch>
-        </p:blipFill>
-        <p:spPr>
-          <a:xfrm>
-            <a:off x="1872384" y="1876655"/>
-            <a:ext cx="7475220" cy="3848100"/>
-          </a:xfrm>
-          <a:prstGeom prst="rect">
-            <a:avLst/>
-          </a:prstGeom>
-        </p:spPr>
-      </p:pic>
-      <p:sp>
-        <p:nvSpPr>
-          <p:cNvPr id="3" name="灯片编号占位符 2"/>
-          <p:cNvSpPr>
-            <a:spLocks noGrp="1"/>
-          </p:cNvSpPr>
-          <p:nvPr>
-            <p:ph type="sldNum" sz="quarter" idx="12"/>
-          </p:nvPr>
-        </p:nvSpPr>
-        <p:spPr/>
-        <p:txBody>
-          <a:bodyPr/>
-          <a:lstStyle/>
-          <a:p>
-            <a:fld id="{506F4176-339E-4C4B-80E4-BBE9C4467EFE}" type="slidenum">
-              <a:rPr lang="zh-CN" altLang="en-US" smtClean="0"/>
-              <a:t>36</a:t>
             </a:fld>
             <a:endParaRPr lang="zh-CN" altLang="en-US"/>
           </a:p>
